--- a/docs/presentaciones/classes/clase-182-intervalos-de-confianza-presentacion.pptx
+++ b/docs/presentaciones/classes/clase-182-intervalos-de-confianza-presentacion.pptx
@@ -4823,7 +4823,7 @@
                 </a:solidFill>
                 <a:latin typeface="Segoe UI"/>
               </a:rPr>
-              <a:t>Primer bloque ejecutable del notebook.</a:t>
+              <a:t>x̄ ± t_{α/2, n-1}·(s/√n). La t tiene colas más anchas que la normal, lo que ensancha correctamente el IC con n chico.</a:t>
             </a:r>
           </a:p>
         </p:txBody>
@@ -4910,7 +4910,235 @@
                 </a:solidFill>
                 <a:latin typeface="Courier New"/>
               </a:rPr>
-              <a:t># Imports y configuración inicial</a:t>
+              <a:t>import numpy as np</a:t>
+            </a:r>
+          </a:p>
+          <a:p>
+            <a:pPr>
+              <a:defRPr sz="1200" b="0">
+                <a:solidFill>
+                  <a:srgbClr val="F8FAFC"/>
+                </a:solidFill>
+                <a:latin typeface="Courier New"/>
+              </a:defRPr>
+            </a:pPr>
+            <a:r>
+              <a:rPr sz="1200" b="0">
+                <a:solidFill>
+                  <a:srgbClr val="F8FAFC"/>
+                </a:solidFill>
+                <a:latin typeface="Courier New"/>
+              </a:rPr>
+              <a:t>from scipy import stats</a:t>
+            </a:r>
+          </a:p>
+          <a:p>
+            <a:pPr>
+              <a:defRPr sz="1200" b="0">
+                <a:solidFill>
+                  <a:srgbClr val="F8FAFC"/>
+                </a:solidFill>
+                <a:latin typeface="Courier New"/>
+              </a:defRPr>
+            </a:pPr>
+            <a:r>
+              <a:rPr sz="1200" b="0">
+                <a:solidFill>
+                  <a:srgbClr val="F8FAFC"/>
+                </a:solidFill>
+                <a:latin typeface="Courier New"/>
+              </a:rPr>
+              <a:t>from statsmodels.stats.proportion import proportion_confint</a:t>
+            </a:r>
+          </a:p>
+          <a:p>
+            <a:pPr>
+              <a:defRPr sz="1200" b="0">
+                <a:solidFill>
+                  <a:srgbClr val="F8FAFC"/>
+                </a:solidFill>
+                <a:latin typeface="Courier New"/>
+              </a:defRPr>
+            </a:pPr>
+            <a:r>
+              <a:rPr sz="1200" b="0">
+                <a:solidFill>
+                  <a:srgbClr val="F8FAFC"/>
+                </a:solidFill>
+                <a:latin typeface="Courier New"/>
+              </a:rPr>
+              <a:t>import matplotlib.pyplot as plt</a:t>
+            </a:r>
+          </a:p>
+          <a:p>
+            <a:pPr>
+              <a:defRPr sz="1200" b="0">
+                <a:solidFill>
+                  <a:srgbClr val="F8FAFC"/>
+                </a:solidFill>
+                <a:latin typeface="Courier New"/>
+              </a:defRPr>
+            </a:pPr>
+            <a:r>
+              <a:rPr sz="1200" b="0">
+                <a:solidFill>
+                  <a:srgbClr val="F8FAFC"/>
+                </a:solidFill>
+                <a:latin typeface="Courier New"/>
+              </a:rPr>
+              <a:t> </a:t>
+            </a:r>
+          </a:p>
+          <a:p>
+            <a:pPr>
+              <a:defRPr sz="1200" b="0">
+                <a:solidFill>
+                  <a:srgbClr val="F8FAFC"/>
+                </a:solidFill>
+                <a:latin typeface="Courier New"/>
+              </a:defRPr>
+            </a:pPr>
+            <a:r>
+              <a:rPr sz="1200" b="0">
+                <a:solidFill>
+                  <a:srgbClr val="F8FAFC"/>
+                </a:solidFill>
+                <a:latin typeface="Courier New"/>
+              </a:rPr>
+              <a:t>rng = np.random.default_rng(42)</a:t>
+            </a:r>
+          </a:p>
+          <a:p>
+            <a:pPr>
+              <a:defRPr sz="1200" b="0">
+                <a:solidFill>
+                  <a:srgbClr val="F8FAFC"/>
+                </a:solidFill>
+                <a:latin typeface="Courier New"/>
+              </a:defRPr>
+            </a:pPr>
+            <a:r>
+              <a:rPr sz="1200" b="0">
+                <a:solidFill>
+                  <a:srgbClr val="F8FAFC"/>
+                </a:solidFill>
+                <a:latin typeface="Courier New"/>
+              </a:rPr>
+              <a:t> </a:t>
+            </a:r>
+          </a:p>
+          <a:p>
+            <a:pPr>
+              <a:defRPr sz="1200" b="0">
+                <a:solidFill>
+                  <a:srgbClr val="F8FAFC"/>
+                </a:solidFill>
+                <a:latin typeface="Courier New"/>
+              </a:defRPr>
+            </a:pPr>
+            <a:r>
+              <a:rPr sz="1200" b="0">
+                <a:solidFill>
+                  <a:srgbClr val="F8FAFC"/>
+                </a:solidFill>
+                <a:latin typeface="Courier New"/>
+              </a:rPr>
+              <a:t>x = rng.normal(20, 8, 200)</a:t>
+            </a:r>
+          </a:p>
+          <a:p>
+            <a:pPr>
+              <a:defRPr sz="1200" b="0">
+                <a:solidFill>
+                  <a:srgbClr val="F8FAFC"/>
+                </a:solidFill>
+                <a:latin typeface="Courier New"/>
+              </a:defRPr>
+            </a:pPr>
+            <a:r>
+              <a:rPr sz="1200" b="0">
+                <a:solidFill>
+                  <a:srgbClr val="F8FAFC"/>
+                </a:solidFill>
+                <a:latin typeface="Courier New"/>
+              </a:rPr>
+              <a:t>n = len(x)</a:t>
+            </a:r>
+          </a:p>
+          <a:p>
+            <a:pPr>
+              <a:defRPr sz="1200" b="0">
+                <a:solidFill>
+                  <a:srgbClr val="F8FAFC"/>
+                </a:solidFill>
+                <a:latin typeface="Courier New"/>
+              </a:defRPr>
+            </a:pPr>
+            <a:r>
+              <a:rPr sz="1200" b="0">
+                <a:solidFill>
+                  <a:srgbClr val="F8FAFC"/>
+                </a:solidFill>
+                <a:latin typeface="Courier New"/>
+              </a:rPr>
+              <a:t>mean, sem = x.mean(), stats.sem(x)</a:t>
+            </a:r>
+          </a:p>
+          <a:p>
+            <a:pPr>
+              <a:defRPr sz="1200" b="0">
+                <a:solidFill>
+                  <a:srgbClr val="F8FAFC"/>
+                </a:solidFill>
+                <a:latin typeface="Courier New"/>
+              </a:defRPr>
+            </a:pPr>
+            <a:r>
+              <a:rPr sz="1200" b="0">
+                <a:solidFill>
+                  <a:srgbClr val="F8FAFC"/>
+                </a:solidFill>
+                <a:latin typeface="Courier New"/>
+              </a:rPr>
+              <a:t>lo, hi = stats.t.interval(0.95, n - 1, loc=mean, scale=sem)</a:t>
+            </a:r>
+          </a:p>
+          <a:p>
+            <a:pPr>
+              <a:defRPr sz="1200" b="0">
+                <a:solidFill>
+                  <a:srgbClr val="F8FAFC"/>
+                </a:solidFill>
+                <a:latin typeface="Courier New"/>
+              </a:defRPr>
+            </a:pPr>
+            <a:r>
+              <a:rPr sz="1200" b="0">
+                <a:solidFill>
+                  <a:srgbClr val="F8FAFC"/>
+                </a:solidFill>
+                <a:latin typeface="Courier New"/>
+              </a:rPr>
+              <a:t>print(f"media={mean:.2f}  IC95% t = ({lo:.2f}, {hi:.2f})")</a:t>
+            </a:r>
+          </a:p>
+          <a:p>
+            <a:pPr>
+              <a:defRPr sz="1200" b="0">
+                <a:solidFill>
+                  <a:srgbClr val="F8FAFC"/>
+                </a:solidFill>
+                <a:latin typeface="Courier New"/>
+              </a:defRPr>
+            </a:pPr>
+            <a:r>
+              <a:rPr sz="1200" b="0">
+                <a:solidFill>
+                  <a:srgbClr val="F8FAFC"/>
+                </a:solidFill>
+                <a:latin typeface="Courier New"/>
+              </a:rPr>
+              <a:t>assert lo &lt; mean &lt; hi</a:t>
             </a:r>
           </a:p>
         </p:txBody>

--- a/docs/presentaciones/classes/clase-182-intervalos-de-confianza-presentacion.pptx
+++ b/docs/presentaciones/classes/clase-182-intervalos-de-confianza-presentacion.pptx
@@ -3272,7 +3272,7 @@
                 </a:solidFill>
                 <a:latin typeface="Segoe UI"/>
               </a:rPr>
-              <a:t>Parte: 3 — Estadística Inferencial y Causal · Fuente: ISLP, cap. 5 + Bruce &amp; Bruce, cap. 2 Confidence Intervals.  Duración estimada: 70 min.</a:t>
+              <a:t>Parte: 3 — Estadística Inferencial y Causal · Fuente: ISLP, cap. 5 + Bruce &amp; Bruce, cap. 2 Confidence Intervals.  Duración estimada: 70 min. · Nivel: Intermedio-Avanzado</a:t>
             </a:r>
           </a:p>
         </p:txBody>
@@ -3581,7 +3581,7 @@
                 </a:solidFill>
                 <a:latin typeface="Segoe UI"/>
               </a:rPr>
-              <a:t>Parte: 3 — Estadística Inferencial y Causal · Fuente: ISLP, cap. 5 + Bruce &amp; Bruce, cap. 2 Confidence Intervals.  Duración estimada: 70 min.</a:t>
+              <a:t>Parte: 3 — Estadística Inferencial y Causal · Fuente: ISLP, cap. 5 + Bruce &amp; Bruce, cap. 2 Confidence Intervals.  Duración estimada: 70 min. · Nivel: Intermedio-Avanzado</a:t>
             </a:r>
           </a:p>
         </p:txBody>
